--- a/decks/geog-tectonic-hazards/geog-tectonic-hazards_ch2_plate-tectonics.pptx
+++ b/decks/geog-tectonic-hazards/geog-tectonic-hazards_ch2_plate-tectonics.pptx
@@ -125,30 +125,30 @@
   <p:extLst>
     <p:ext uri="{521415D9-36F7-43E2-AB2F-B90AF26B5E84}">
       <p14:sectionLst xmlns:p14="http://schemas.microsoft.com/office/powerpoint/2010/main">
-        <p14:section name="Opening" id="{6edc17c0-cc93-4a05-29b0-eb2a93fbdb78}">
+        <p14:section name="Opening" id="{9ccb998a-3a7e-6549-280d-78530b151765}">
           <p14:sldIdLst>
             <p14:sldId id="256"/>
           </p14:sldIdLst>
         </p14:section>
-        <p14:section name="Gate" id="{8a544026-41cb-cc89-6a4b-09e710c08ffd}">
+        <p14:section name="Gate" id="{fec75a86-15c9-58fb-3c79-5376e43880e4}">
           <p14:sldIdLst>
             <p14:sldId id="257"/>
             <p14:sldId id="258"/>
           </p14:sldIdLst>
         </p14:section>
-        <p14:section name="Pre-teach" id="{272c85b2-b711-2f53-a5de-b2293c2ff427}">
+        <p14:section name="Pre-teach" id="{47dcc751-c58f-e0f0-9526-8214ab2282e2}">
           <p14:sldIdLst>
             <p14:sldId id="259"/>
             <p14:sldId id="260"/>
           </p14:sldIdLst>
         </p14:section>
-        <p14:section name="Read-along" id="{e2c855f3-e782-261d-4c09-137291d2dfd4}">
+        <p14:section name="Read-along" id="{c09e05ac-303d-c1e5-1401-0bb54a92102d}">
           <p14:sldIdLst>
             <p14:sldId id="261"/>
             <p14:sldId id="262"/>
           </p14:sldIdLst>
         </p14:section>
-        <p14:section name="Teach" id="{5ff98fed-3076-be9d-371c-a9c8291c275b}">
+        <p14:section name="Teach" id="{332db669-26d6-e332-acda-b4829f6b0aaa}">
           <p14:sldIdLst>
             <p14:sldId id="263"/>
             <p14:sldId id="264"/>
@@ -157,19 +157,19 @@
             <p14:sldId id="267"/>
           </p14:sldIdLst>
         </p14:section>
-        <p14:section name="Routes" id="{dd961c50-a94b-4892-ae2a-0707ab23cdd6}">
+        <p14:section name="Routes" id="{ba80c58f-19cb-adfc-b12d-24079d75b10d}">
           <p14:sldIdLst>
             <p14:sldId id="268"/>
             <p14:sldId id="269"/>
             <p14:sldId id="270"/>
           </p14:sldIdLst>
         </p14:section>
-        <p14:section name="Close" id="{a0b130ed-d8e4-19f4-2fd3-272aee560d2c}">
+        <p14:section name="Close" id="{b7d019e7-648e-b0f2-06b9-e6dd26483399}">
           <p14:sldIdLst>
             <p14:sldId id="271"/>
           </p14:sldIdLst>
         </p14:section>
-        <p14:section name="Answers" id="{e618a37e-0dfa-df7d-bf91-224ac34c8772}">
+        <p14:section name="Answers" id="{a2397133-0c1b-421f-575c-469133b56206}">
           <p14:sldIdLst>
             <p14:sldId id="272"/>
             <p14:sldId id="273"/>
@@ -673,7 +673,7 @@
               <a:rPr lang="en-US" dirty="0"/>
               <a:t>Teach — Inside the Earth. Say it in your own words, then check understanding with a quick question: ask a pupil from the pre-teach group first, since they met these words and ideas before the lesson. Pupils try to recall before you re-explain.
 The Earth is built in layers. On the outside is the crust, the thin solid shell we live on. Under it is the mantle, a very thick layer of hot rock that can flow extremely slowly. Beneath that is the outer core, and at the centre the inner core, the hottest part of the planet. Every tectonic hazard begins with processes deep inside the Earth, so you need the layers in order from the surface inwards: crust, mantle, outer core, inner core.
-A tectonic plate is the crust plus the upper part of the mantle, moving as one slab. What moves it is convection: heat from deep inside the Earth makes material in the mantle rise, spread out beneath the plates, cool and sink again. This slow circling drags the plates along a few centimetres a year. Your deck puts these currents in the core; in fact they are in the mantle, the layer directly beneath the plates, which the core heats from below.
+A tectonic plate is the crust plus the upper part of the mantle, moving as one slab. What moves it is convection: heat from deep inside the Earth makes material in the mantle rise, spread out beneath the plates, cool and sink again. This slow circling drags the plates along a few centimetres a year. Your class notes put these currents in the core; in fact they are in the mantle, the layer directly beneath the plates, which the core heats from below.
 Everything tectonic comes from this movement. Plates move towards each other, away from each other or side by side, and each kind of movement makes its own hazards and landforms. That is the subject of the next chapter.
 Tip: Learn the layers as a journey inwards: crust, mantle, outer core, inner core. The plates are crust plus upper mantle, not crust alone.</a:t>
             </a:r>
